--- a/lecons/F4/44_F4_M2_L34_Arable_Agriculture_in_Cameroon.pptx
+++ b/lecons/F4/44_F4_M2_L34_Arable_Agriculture_in_Cameroon.pptx
@@ -3103,7 +3103,7 @@
           <a:p>
             <a:r>
               <a:rPr lang="en-US" dirty="0"/>
-              <a:t>Let us copy Commercial Farming. Commercial farming in Cameroon has the following characteristics. On this slide we have Small-holder cash crops and Plantations. Write each point on a new line, with the key term first, and explain it in your own words when we revise. When you finish, we go to the next slide.</a:t>
+              <a:t>Let us copy Commercial Farming. The characteristics and distribution of commercial farming in Cameroon are the following. On this slide we have Small-holder cash crops. Write each point on a new line, with the key term first, and explain it in your own words when we revise. When you finish, we go to the next slide.</a:t>
             </a:r>
             <a:endParaRPr lang="en-US" dirty="0"/>
           </a:p>
@@ -3191,7 +3191,7 @@
           <a:p>
             <a:r>
               <a:rPr lang="en-US" dirty="0"/>
-              <a:t>We continue with Commercial Farming. On this slide we have Distribution. Write each point on a new line, with the key term first, and explain it in your own words when we revise.</a:t>
+              <a:t>We continue with Commercial Farming. On this slide we have Plantations and Distribution. Write each point on a new line, with the key term first, and explain it in your own words when we revise.</a:t>
             </a:r>
             <a:endParaRPr lang="en-US" dirty="0"/>
           </a:p>
@@ -12859,7 +12859,7 @@
         <p:spPr>
           <a:xfrm>
             <a:off x="0" y="658368"/>
-            <a:ext cx="2468880" cy="5833872"/>
+            <a:ext cx="5120640" cy="5833872"/>
           </a:xfrm>
           <a:prstGeom prst="rect">
             <a:avLst/>
@@ -12874,8 +12874,8 @@
         </p:nvSpPr>
         <p:spPr>
           <a:xfrm>
-            <a:off x="2697480" y="1005840"/>
-            <a:ext cx="9174175" cy="731520"/>
+            <a:off x="5349240" y="1005840"/>
+            <a:ext cx="6522415" cy="731520"/>
           </a:xfrm>
           <a:prstGeom prst="rect">
             <a:avLst/>
@@ -12915,8 +12915,8 @@
         </p:nvSpPr>
         <p:spPr>
           <a:xfrm>
-            <a:off x="2697480" y="1783080"/>
-            <a:ext cx="9174175" cy="4663440"/>
+            <a:off x="5349240" y="1783080"/>
+            <a:ext cx="6522415" cy="4663440"/>
           </a:xfrm>
           <a:prstGeom prst="rect">
             <a:avLst/>
@@ -12935,7 +12935,7 @@
               <a:buNone/>
             </a:pPr>
             <a:r>
-              <a:rPr lang="en-US" sz="4000" b="1" dirty="0">
+              <a:rPr lang="en-US" sz="3200" b="1" dirty="0">
                 <a:solidFill>
                   <a:srgbClr val="111111"/>
                 </a:solidFill>
@@ -12945,7 +12945,7 @@
               </a:rPr>
               <a:t>Topic: Managing Resources for Development through Economic Activities</a:t>
             </a:r>
-            <a:endParaRPr lang="en-US" sz="4000" dirty="0"/>
+            <a:endParaRPr lang="en-US" sz="3200" dirty="0"/>
           </a:p>
           <a:p>
             <a:pPr algn="l" indent="0" marL="0">
@@ -12955,7 +12955,7 @@
               <a:buNone/>
             </a:pPr>
             <a:r>
-              <a:rPr lang="en-US" sz="4000" b="1" dirty="0">
+              <a:rPr lang="en-US" sz="3200" b="1" dirty="0">
                 <a:solidFill>
                   <a:srgbClr val="111111"/>
                 </a:solidFill>
@@ -12965,7 +12965,7 @@
               </a:rPr>
               <a:t>Sub-topic: The Economic Development Potentials of Cameroon in the Primary Sector: Agriculture</a:t>
             </a:r>
-            <a:endParaRPr lang="en-US" sz="4000" dirty="0"/>
+            <a:endParaRPr lang="en-US" sz="3200" dirty="0"/>
           </a:p>
           <a:p>
             <a:pPr algn="l" indent="0" marL="0">
@@ -12975,7 +12975,7 @@
               <a:buNone/>
             </a:pPr>
             <a:r>
-              <a:rPr lang="en-US" sz="4000" b="1" dirty="0">
+              <a:rPr lang="en-US" sz="3200" b="1" dirty="0">
                 <a:solidFill>
                   <a:srgbClr val="990011"/>
                 </a:solidFill>
@@ -12985,7 +12985,7 @@
               </a:rPr>
               <a:t>Lesson 34: Arable Agriculture in Cameroon</a:t>
             </a:r>
-            <a:endParaRPr lang="en-US" sz="4000" dirty="0"/>
+            <a:endParaRPr lang="en-US" sz="3200" dirty="0"/>
           </a:p>
         </p:txBody>
       </p:sp>
@@ -13647,7 +13647,7 @@
         <p:spPr>
           <a:xfrm>
             <a:off x="0" y="658368"/>
-            <a:ext cx="2468880" cy="5833872"/>
+            <a:ext cx="5120640" cy="5833872"/>
           </a:xfrm>
           <a:prstGeom prst="rect">
             <a:avLst/>
@@ -13662,8 +13662,8 @@
         </p:nvSpPr>
         <p:spPr>
           <a:xfrm>
-            <a:off x="2697480" y="1005840"/>
-            <a:ext cx="9174175" cy="731520"/>
+            <a:off x="5349240" y="1005840"/>
+            <a:ext cx="6522415" cy="731520"/>
           </a:xfrm>
           <a:prstGeom prst="rect">
             <a:avLst/>
@@ -13703,8 +13703,8 @@
         </p:nvSpPr>
         <p:spPr>
           <a:xfrm>
-            <a:off x="2697480" y="1783080"/>
-            <a:ext cx="9174175" cy="4663440"/>
+            <a:off x="5349240" y="1783080"/>
+            <a:ext cx="6522415" cy="4663440"/>
           </a:xfrm>
           <a:prstGeom prst="rect">
             <a:avLst/>
@@ -13731,7 +13731,7 @@
                 <a:ea typeface="Times New Roman" pitchFamily="34" charset="-122"/>
                 <a:cs typeface="Times New Roman" pitchFamily="34" charset="-120"/>
               </a:rPr>
-              <a:t>Commercial farming in Cameroon has the following characteristics:</a:t>
+              <a:t>The characteristics and distribution of commercial farming in Cameroon are the following:</a:t>
             </a:r>
             <a:endParaRPr lang="en-US" sz="4000" dirty="0"/>
           </a:p>
@@ -13769,43 +13769,6 @@
                 <a:cs typeface="Times New Roman" pitchFamily="34" charset="-120"/>
               </a:rPr>
               <a:t>Farmers grow cocoa, coffee and cotton for sale.</a:t>
-            </a:r>
-            <a:endParaRPr lang="en-US" sz="4000" dirty="0"/>
-          </a:p>
-          <a:p>
-            <a:pPr algn="l" indent="0" marL="0">
-              <a:spcAft>
-                <a:spcPts val="800"/>
-              </a:spcAft>
-              <a:buNone/>
-            </a:pPr>
-            <a:r>
-              <a:rPr lang="en-US" sz="4000" b="1" dirty="0">
-                <a:solidFill>
-                  <a:srgbClr val="111111"/>
-                </a:solidFill>
-                <a:latin typeface="Times New Roman" pitchFamily="34" charset="0"/>
-                <a:ea typeface="Times New Roman" pitchFamily="34" charset="-122"/>
-                <a:cs typeface="Times New Roman" pitchFamily="34" charset="-120"/>
-              </a:rPr>
-              <a:t>Plantations: </a:t>
-            </a:r>
-            <a:pPr algn="l" indent="0" marL="0">
-              <a:spcAft>
-                <a:spcPts val="800"/>
-              </a:spcAft>
-              <a:buNone/>
-            </a:pPr>
-            <a:r>
-              <a:rPr lang="en-US" sz="4000" dirty="0">
-                <a:solidFill>
-                  <a:srgbClr val="111111"/>
-                </a:solidFill>
-                <a:latin typeface="Times New Roman" pitchFamily="34" charset="0"/>
-                <a:ea typeface="Times New Roman" pitchFamily="34" charset="-122"/>
-                <a:cs typeface="Times New Roman" pitchFamily="34" charset="-120"/>
-              </a:rPr>
-              <a:t>Agro-industries such as the CDC, SOCAPALM and SOSUCAM grow bananas, oil palm, rubber and sugar cane.</a:t>
             </a:r>
             <a:endParaRPr lang="en-US" sz="4000" dirty="0"/>
           </a:p>
@@ -13940,7 +13903,7 @@
         <p:spPr>
           <a:xfrm>
             <a:off x="0" y="658368"/>
-            <a:ext cx="5120640" cy="5833872"/>
+            <a:ext cx="3840480" cy="5833872"/>
           </a:xfrm>
           <a:prstGeom prst="rect">
             <a:avLst/>
@@ -13955,8 +13918,8 @@
         </p:nvSpPr>
         <p:spPr>
           <a:xfrm>
-            <a:off x="5349240" y="1005840"/>
-            <a:ext cx="6522415" cy="731520"/>
+            <a:off x="4069080" y="1005840"/>
+            <a:ext cx="7802575" cy="731520"/>
           </a:xfrm>
           <a:prstGeom prst="rect">
             <a:avLst/>
@@ -13996,8 +13959,8 @@
         </p:nvSpPr>
         <p:spPr>
           <a:xfrm>
-            <a:off x="5349240" y="1783080"/>
-            <a:ext cx="6522415" cy="4663440"/>
+            <a:off x="4069080" y="1783080"/>
+            <a:ext cx="7802575" cy="4663440"/>
           </a:xfrm>
           <a:prstGeom prst="rect">
             <a:avLst/>
@@ -14008,6 +13971,43 @@
         <p:txBody>
           <a:bodyPr wrap="square" lIns="0" tIns="0" rIns="0" bIns="0" rtlCol="0" anchor="t"/>
           <a:lstStyle/>
+          <a:p>
+            <a:pPr algn="l" indent="0" marL="0">
+              <a:spcAft>
+                <a:spcPts val="800"/>
+              </a:spcAft>
+              <a:buNone/>
+            </a:pPr>
+            <a:r>
+              <a:rPr lang="en-US" sz="4000" b="1" dirty="0">
+                <a:solidFill>
+                  <a:srgbClr val="111111"/>
+                </a:solidFill>
+                <a:latin typeface="Times New Roman" pitchFamily="34" charset="0"/>
+                <a:ea typeface="Times New Roman" pitchFamily="34" charset="-122"/>
+                <a:cs typeface="Times New Roman" pitchFamily="34" charset="-120"/>
+              </a:rPr>
+              <a:t>Plantations: </a:t>
+            </a:r>
+            <a:pPr algn="l" indent="0" marL="0">
+              <a:spcAft>
+                <a:spcPts val="800"/>
+              </a:spcAft>
+              <a:buNone/>
+            </a:pPr>
+            <a:r>
+              <a:rPr lang="en-US" sz="4000" dirty="0">
+                <a:solidFill>
+                  <a:srgbClr val="111111"/>
+                </a:solidFill>
+                <a:latin typeface="Times New Roman" pitchFamily="34" charset="0"/>
+                <a:ea typeface="Times New Roman" pitchFamily="34" charset="-122"/>
+                <a:cs typeface="Times New Roman" pitchFamily="34" charset="-120"/>
+              </a:rPr>
+              <a:t>Agro-industries such as the CDC, SOCAPALM and SOSUCAM grow bananas, oil palm, rubber and sugar cane.</a:t>
+            </a:r>
+            <a:endParaRPr lang="en-US" sz="4000" dirty="0"/>
+          </a:p>
           <a:p>
             <a:pPr algn="l" indent="0" marL="0">
               <a:spcAft>
